--- a/Caretaker's Cycle presentation.pptx
+++ b/Caretaker's Cycle presentation.pptx
@@ -5,7 +5,7 @@
     <p:sldMasterId id="2147483685" r:id="rId4"/>
   </p:sldMasterIdLst>
   <p:notesMasterIdLst>
-    <p:notesMasterId r:id="rId12"/>
+    <p:notesMasterId r:id="rId14"/>
   </p:notesMasterIdLst>
   <p:sldIdLst>
     <p:sldId id="356" r:id="rId5"/>
@@ -14,7 +14,9 @@
     <p:sldId id="350" r:id="rId8"/>
     <p:sldId id="284" r:id="rId9"/>
     <p:sldId id="285" r:id="rId10"/>
-    <p:sldId id="347" r:id="rId11"/>
+    <p:sldId id="357" r:id="rId11"/>
+    <p:sldId id="358" r:id="rId12"/>
+    <p:sldId id="347" r:id="rId13"/>
   </p:sldIdLst>
   <p:sldSz cx="12192000" cy="6858000"/>
   <p:notesSz cx="6858000" cy="9144000"/>
@@ -5263,6 +5265,267 @@
 </file>
 
 <file path=ppt/slides/slide7.xml><?xml version="1.0" encoding="utf-8"?>
+<p:sld xmlns:a="http://schemas.openxmlformats.org/drawingml/2006/main" xmlns:r="http://schemas.openxmlformats.org/officeDocument/2006/relationships" xmlns:p="http://schemas.openxmlformats.org/presentationml/2006/main">
+  <p:cSld>
+    <p:spTree>
+      <p:nvGrpSpPr>
+        <p:cNvPr id="1" name=""/>
+        <p:cNvGrpSpPr/>
+        <p:nvPr/>
+      </p:nvGrpSpPr>
+      <p:grpSpPr>
+        <a:xfrm>
+          <a:off x="0" y="0"/>
+          <a:ext cx="0" cy="0"/>
+          <a:chOff x="0" y="0"/>
+          <a:chExt cx="0" cy="0"/>
+        </a:xfrm>
+      </p:grpSpPr>
+      <p:pic>
+        <p:nvPicPr>
+          <p:cNvPr id="6" name="Picture Placeholder 5">
+            <a:extLst>
+              <a:ext uri="{FF2B5EF4-FFF2-40B4-BE49-F238E27FC236}">
+                <a16:creationId xmlns:a16="http://schemas.microsoft.com/office/drawing/2014/main" id="{2F392F46-B12E-4C0D-B933-9423DDB550DF}"/>
+              </a:ext>
+            </a:extLst>
+          </p:cNvPr>
+          <p:cNvPicPr>
+            <a:picLocks noGrp="1" noChangeAspect="1"/>
+          </p:cNvPicPr>
+          <p:nvPr>
+            <p:ph type="pic" sz="quarter" idx="13"/>
+          </p:nvPr>
+        </p:nvPicPr>
+        <p:blipFill>
+          <a:blip r:embed="rId2"/>
+          <a:srcRect l="24646" r="24646"/>
+          <a:stretch>
+            <a:fillRect/>
+          </a:stretch>
+        </p:blipFill>
+        <p:spPr/>
+      </p:pic>
+      <p:sp>
+        <p:nvSpPr>
+          <p:cNvPr id="3" name="Title 2">
+            <a:extLst>
+              <a:ext uri="{FF2B5EF4-FFF2-40B4-BE49-F238E27FC236}">
+                <a16:creationId xmlns:a16="http://schemas.microsoft.com/office/drawing/2014/main" id="{79F9690A-5448-44E5-9DA1-656303B71EEC}"/>
+              </a:ext>
+            </a:extLst>
+          </p:cNvPr>
+          <p:cNvSpPr>
+            <a:spLocks noGrp="1"/>
+          </p:cNvSpPr>
+          <p:nvPr>
+            <p:ph type="title"/>
+          </p:nvPr>
+        </p:nvSpPr>
+        <p:spPr/>
+        <p:txBody>
+          <a:bodyPr/>
+          <a:lstStyle/>
+          <a:p>
+            <a:r>
+              <a:rPr lang="en-US" dirty="0"/>
+              <a:t>Puzzle One</a:t>
+            </a:r>
+          </a:p>
+        </p:txBody>
+      </p:sp>
+      <p:sp>
+        <p:nvSpPr>
+          <p:cNvPr id="4" name="Content Placeholder 3">
+            <a:extLst>
+              <a:ext uri="{FF2B5EF4-FFF2-40B4-BE49-F238E27FC236}">
+                <a16:creationId xmlns:a16="http://schemas.microsoft.com/office/drawing/2014/main" id="{3CC186C6-5565-4F99-AEC9-4CA2DC51318B}"/>
+              </a:ext>
+            </a:extLst>
+          </p:cNvPr>
+          <p:cNvSpPr>
+            <a:spLocks noGrp="1"/>
+          </p:cNvSpPr>
+          <p:nvPr>
+            <p:ph sz="half" idx="2"/>
+          </p:nvPr>
+        </p:nvSpPr>
+        <p:spPr/>
+        <p:txBody>
+          <a:bodyPr/>
+          <a:lstStyle/>
+          <a:p>
+            <a:r>
+              <a:rPr lang="en-US" dirty="0"/>
+              <a:t>Reconnect broken circuits by wiring bulbs and a generator.</a:t>
+            </a:r>
+          </a:p>
+          <a:p>
+            <a:r>
+              <a:rPr lang="en-US" dirty="0"/>
+              <a:t>Explore the area and see what is required to restart the process .</a:t>
+            </a:r>
+            <a:r>
+              <a:rPr lang="en-US" dirty="0" err="1"/>
+              <a:t>i.e</a:t>
+            </a:r>
+            <a:r>
+              <a:rPr lang="en-US" dirty="0"/>
+              <a:t> which type of trees.</a:t>
+            </a:r>
+          </a:p>
+          <a:p>
+            <a:r>
+              <a:rPr lang="en-US" dirty="0"/>
+              <a:t>One or multiple</a:t>
+            </a:r>
+          </a:p>
+        </p:txBody>
+      </p:sp>
+    </p:spTree>
+    <p:extLst>
+      <p:ext uri="{BB962C8B-B14F-4D97-AF65-F5344CB8AC3E}">
+        <p14:creationId xmlns:p14="http://schemas.microsoft.com/office/powerpoint/2010/main" val="4577234"/>
+      </p:ext>
+    </p:extLst>
+  </p:cSld>
+  <p:clrMapOvr>
+    <a:masterClrMapping/>
+  </p:clrMapOvr>
+</p:sld>
+</file>
+
+<file path=ppt/slides/slide8.xml><?xml version="1.0" encoding="utf-8"?>
+<p:sld xmlns:a="http://schemas.openxmlformats.org/drawingml/2006/main" xmlns:r="http://schemas.openxmlformats.org/officeDocument/2006/relationships" xmlns:p="http://schemas.openxmlformats.org/presentationml/2006/main">
+  <p:cSld>
+    <p:spTree>
+      <p:nvGrpSpPr>
+        <p:cNvPr id="1" name=""/>
+        <p:cNvGrpSpPr/>
+        <p:nvPr/>
+      </p:nvGrpSpPr>
+      <p:grpSpPr>
+        <a:xfrm>
+          <a:off x="0" y="0"/>
+          <a:ext cx="0" cy="0"/>
+          <a:chOff x="0" y="0"/>
+          <a:chExt cx="0" cy="0"/>
+        </a:xfrm>
+      </p:grpSpPr>
+      <p:pic>
+        <p:nvPicPr>
+          <p:cNvPr id="6" name="Picture Placeholder 5">
+            <a:extLst>
+              <a:ext uri="{FF2B5EF4-FFF2-40B4-BE49-F238E27FC236}">
+                <a16:creationId xmlns:a16="http://schemas.microsoft.com/office/drawing/2014/main" id="{13C558F9-709E-4F55-82D8-71CEBD6D5E25}"/>
+              </a:ext>
+            </a:extLst>
+          </p:cNvPr>
+          <p:cNvPicPr>
+            <a:picLocks noGrp="1" noChangeAspect="1"/>
+          </p:cNvPicPr>
+          <p:nvPr>
+            <p:ph type="pic" sz="quarter" idx="13"/>
+          </p:nvPr>
+        </p:nvPicPr>
+        <p:blipFill>
+          <a:blip r:embed="rId2"/>
+          <a:srcRect l="24197" r="24197"/>
+          <a:stretch>
+            <a:fillRect/>
+          </a:stretch>
+        </p:blipFill>
+        <p:spPr/>
+      </p:pic>
+      <p:sp>
+        <p:nvSpPr>
+          <p:cNvPr id="3" name="Title 2">
+            <a:extLst>
+              <a:ext uri="{FF2B5EF4-FFF2-40B4-BE49-F238E27FC236}">
+                <a16:creationId xmlns:a16="http://schemas.microsoft.com/office/drawing/2014/main" id="{32FD8870-2D83-43DC-B209-2EF4633E2A6E}"/>
+              </a:ext>
+            </a:extLst>
+          </p:cNvPr>
+          <p:cNvSpPr>
+            <a:spLocks noGrp="1"/>
+          </p:cNvSpPr>
+          <p:nvPr>
+            <p:ph type="title"/>
+          </p:nvPr>
+        </p:nvSpPr>
+        <p:spPr/>
+        <p:txBody>
+          <a:bodyPr/>
+          <a:lstStyle/>
+          <a:p>
+            <a:r>
+              <a:rPr lang="en-US" dirty="0"/>
+              <a:t>Puzzle Two</a:t>
+            </a:r>
+          </a:p>
+        </p:txBody>
+      </p:sp>
+      <p:sp>
+        <p:nvSpPr>
+          <p:cNvPr id="4" name="Content Placeholder 3">
+            <a:extLst>
+              <a:ext uri="{FF2B5EF4-FFF2-40B4-BE49-F238E27FC236}">
+                <a16:creationId xmlns:a16="http://schemas.microsoft.com/office/drawing/2014/main" id="{64F893A5-F726-4688-B124-91FB73885E5A}"/>
+              </a:ext>
+            </a:extLst>
+          </p:cNvPr>
+          <p:cNvSpPr>
+            <a:spLocks noGrp="1"/>
+          </p:cNvSpPr>
+          <p:nvPr>
+            <p:ph sz="half" idx="2"/>
+          </p:nvPr>
+        </p:nvSpPr>
+        <p:spPr/>
+        <p:txBody>
+          <a:bodyPr/>
+          <a:lstStyle/>
+          <a:p>
+            <a:r>
+              <a:rPr lang="en-US" dirty="0"/>
+              <a:t>Restore environmental balance by planting two trees in designated zones.</a:t>
+            </a:r>
+          </a:p>
+          <a:p>
+            <a:r>
+              <a:rPr lang="en-US" dirty="0"/>
+              <a:t>Small environmental clues and objects hint at humanity's past.</a:t>
+            </a:r>
+          </a:p>
+          <a:p>
+            <a:r>
+              <a:rPr lang="en-US"/>
+              <a:t>Player </a:t>
+            </a:r>
+            <a:r>
+              <a:rPr lang="en-US" dirty="0"/>
+              <a:t>must actively balance nature and tech elements to progress.</a:t>
+            </a:r>
+          </a:p>
+          <a:p>
+            <a:endParaRPr lang="en-US" dirty="0"/>
+          </a:p>
+        </p:txBody>
+      </p:sp>
+    </p:spTree>
+    <p:extLst>
+      <p:ext uri="{BB962C8B-B14F-4D97-AF65-F5344CB8AC3E}">
+        <p14:creationId xmlns:p14="http://schemas.microsoft.com/office/powerpoint/2010/main" val="2390085830"/>
+      </p:ext>
+    </p:extLst>
+  </p:cSld>
+  <p:clrMapOvr>
+    <a:masterClrMapping/>
+  </p:clrMapOvr>
+</p:sld>
+</file>
+
+<file path=ppt/slides/slide9.xml><?xml version="1.0" encoding="utf-8"?>
 <p:sld xmlns:a="http://schemas.openxmlformats.org/drawingml/2006/main" xmlns:r="http://schemas.openxmlformats.org/officeDocument/2006/relationships" xmlns:p="http://schemas.openxmlformats.org/presentationml/2006/main">
   <p:cSld>
     <p:spTree>
@@ -5969,15 +6232,6 @@
 </file>
 
 <file path=customXml/item1.xml><?xml version="1.0" encoding="utf-8"?>
-<?mso-contentType ?>
-<FormTemplates xmlns="http://schemas.microsoft.com/sharepoint/v3/contenttype/forms">
-  <Display>DocumentLibraryForm</Display>
-  <Edit>DocumentLibraryForm</Edit>
-  <New>DocumentLibraryForm</New>
-</FormTemplates>
-</file>
-
-<file path=customXml/item2.xml><?xml version="1.0" encoding="utf-8"?>
 <ct:contentTypeSchema xmlns:ct="http://schemas.microsoft.com/office/2006/metadata/contentType" xmlns:ma="http://schemas.microsoft.com/office/2006/metadata/properties/metaAttributes" ct:_="" ma:_="" ma:contentTypeName="Document" ma:contentTypeID="0x01010079F111ED35F8CC479449609E8A0923A6" ma:contentTypeVersion="12" ma:contentTypeDescription="Create a new document." ma:contentTypeScope="" ma:versionID="426e97fa315356fffbdcd9876fe988c2">
   <xsd:schema xmlns:xsd="http://www.w3.org/2001/XMLSchema" xmlns:xs="http://www.w3.org/2001/XMLSchema" xmlns:p="http://schemas.microsoft.com/office/2006/metadata/properties" xmlns:ns2="71af3243-3dd4-4a8d-8c0d-dd76da1f02a5" xmlns:ns3="16c05727-aa75-4e4a-9b5f-8a80a1165891" targetNamespace="http://schemas.microsoft.com/office/2006/metadata/properties" ma:root="true" ma:fieldsID="14b8f0def80e6d70ce3def20c90759ae" ns2:_="" ns3:_="">
     <xsd:import namespace="71af3243-3dd4-4a8d-8c0d-dd76da1f02a5"/>
@@ -6198,6 +6452,15 @@
 </ct:contentTypeSchema>
 </file>
 
+<file path=customXml/item2.xml><?xml version="1.0" encoding="utf-8"?>
+<?mso-contentType ?>
+<FormTemplates xmlns="http://schemas.microsoft.com/sharepoint/v3/contenttype/forms">
+  <Display>DocumentLibraryForm</Display>
+  <Edit>DocumentLibraryForm</Edit>
+  <New>DocumentLibraryForm</New>
+</FormTemplates>
+</file>
+
 <file path=customXml/item3.xml><?xml version="1.0" encoding="utf-8"?>
 <p:properties xmlns:p="http://schemas.microsoft.com/office/2006/metadata/properties" xmlns:xsi="http://www.w3.org/2001/XMLSchema-instance" xmlns:pc="http://schemas.microsoft.com/office/infopath/2007/PartnerControls">
   <documentManagement>
@@ -6208,14 +6471,6 @@
 </file>
 
 <file path=customXml/itemProps1.xml><?xml version="1.0" encoding="utf-8"?>
-<ds:datastoreItem xmlns:ds="http://schemas.openxmlformats.org/officeDocument/2006/customXml" ds:itemID="{2C74EDC3-6C87-4699-93BC-02BA54C8E071}">
-  <ds:schemaRefs>
-    <ds:schemaRef ds:uri="http://schemas.microsoft.com/sharepoint/v3/contenttype/forms"/>
-  </ds:schemaRefs>
-</ds:datastoreItem>
-</file>
-
-<file path=customXml/itemProps2.xml><?xml version="1.0" encoding="utf-8"?>
 <ds:datastoreItem xmlns:ds="http://schemas.openxmlformats.org/officeDocument/2006/customXml" ds:itemID="{147902AF-9AD5-48A3-AD68-95C39B09F399}">
   <ds:schemaRefs>
     <ds:schemaRef ds:uri="http://schemas.microsoft.com/office/2006/metadata/contentType"/>
@@ -6234,6 +6489,14 @@
 </ds:datastoreItem>
 </file>
 
+<file path=customXml/itemProps2.xml><?xml version="1.0" encoding="utf-8"?>
+<ds:datastoreItem xmlns:ds="http://schemas.openxmlformats.org/officeDocument/2006/customXml" ds:itemID="{2C74EDC3-6C87-4699-93BC-02BA54C8E071}">
+  <ds:schemaRefs>
+    <ds:schemaRef ds:uri="http://schemas.microsoft.com/sharepoint/v3/contenttype/forms"/>
+  </ds:schemaRefs>
+</ds:datastoreItem>
+</file>
+
 <file path=customXml/itemProps3.xml><?xml version="1.0" encoding="utf-8"?>
 <ds:datastoreItem xmlns:ds="http://schemas.openxmlformats.org/officeDocument/2006/customXml" ds:itemID="{6F000AB2-1957-427C-B872-176ABC83E732}">
   <ds:schemaRefs>
